--- a/Malaria_Predictive_model.pptx
+++ b/Malaria_Predictive_model.pptx
@@ -2590,11 +2590,11 @@
         <a:p>
           <a:r>
             <a:rPr lang="en-US" b="1" dirty="0"/>
-            <a:t>Reactive responses in ASAL regions lead to stock-outs, Health Care Worker  burnout, and excess morbidity</a:t>
+            <a:t>Reactive responses in ASAL regions lead to stock-outs, Health Care Worker  burnout, and excess morbidity </a:t>
           </a:r>
           <a:r>
             <a:rPr lang="en-US" dirty="0"/>
-            <a:t>, especially among pregnant women and children.</a:t>
+            <a:t>, especially among pregnant women and children and mortality.</a:t>
           </a:r>
         </a:p>
       </dgm:t>
@@ -2804,7 +2804,7 @@
   <dgm:whole/>
   <dgm:extLst>
     <a:ext uri="http://schemas.microsoft.com/office/drawing/2008/diagram">
-      <dsp:dataModelExt xmlns:dsp="http://schemas.microsoft.com/office/drawing/2008/diagram" relId="rId6" minVer="http://schemas.openxmlformats.org/drawingml/2006/diagram"/>
+      <dsp:dataModelExt xmlns:dsp="http://schemas.microsoft.com/office/drawing/2008/diagram" relId="rId7" minVer="http://schemas.openxmlformats.org/drawingml/2006/diagram"/>
     </a:ext>
   </dgm:extLst>
 </dgm:dataModel>
@@ -3177,7 +3177,7 @@
         <a:p>
           <a:r>
             <a:rPr lang="en-US" dirty="0"/>
-            <a:t>Case</a:t>
+            <a:t>Cases</a:t>
           </a:r>
         </a:p>
       </dgm:t>
@@ -4001,11 +4001,11 @@
           </a:pPr>
           <a:r>
             <a:rPr lang="en-US" sz="1600" b="1" kern="1200" dirty="0"/>
-            <a:t>Reactive responses in ASAL regions lead to stock-outs, Health Care Worker  burnout, and excess morbidity</a:t>
+            <a:t>Reactive responses in ASAL regions lead to stock-outs, Health Care Worker  burnout, and excess morbidity </a:t>
           </a:r>
           <a:r>
             <a:rPr lang="en-US" sz="1600" kern="1200" dirty="0"/>
-            <a:t>, especially among pregnant women and children.</a:t>
+            <a:t>, especially among pregnant women and children and mortality.</a:t>
           </a:r>
         </a:p>
       </dsp:txBody>
@@ -4995,7 +4995,7 @@
           </a:pPr>
           <a:r>
             <a:rPr lang="en-US" sz="1600" kern="1200" dirty="0"/>
-            <a:t>Case</a:t>
+            <a:t>Cases</a:t>
           </a:r>
         </a:p>
       </dsp:txBody>
@@ -11258,6 +11258,90 @@
           <a:p>
             <a:fld id="{4AA9B88B-3CB7-4870-AE6B-435724C3E8E3}" type="slidenum">
               <a:rPr lang="en-US" smtClean="0"/>
+              <a:t>2</a:t>
+            </a:fld>
+            <a:endParaRPr lang="en-US"/>
+          </a:p>
+        </p:txBody>
+      </p:sp>
+    </p:spTree>
+    <p:extLst>
+      <p:ext uri="{BB962C8B-B14F-4D97-AF65-F5344CB8AC3E}">
+        <p14:creationId xmlns:p14="http://schemas.microsoft.com/office/powerpoint/2010/main" val="4043649527"/>
+      </p:ext>
+    </p:extLst>
+  </p:cSld>
+  <p:clrMapOvr>
+    <a:masterClrMapping/>
+  </p:clrMapOvr>
+</p:notes>
+</file>
+
+<file path=ppt/notesSlides/notesSlide2.xml><?xml version="1.0" encoding="utf-8"?>
+<p:notes xmlns:a="http://schemas.openxmlformats.org/drawingml/2006/main" xmlns:r="http://schemas.openxmlformats.org/officeDocument/2006/relationships" xmlns:p="http://schemas.openxmlformats.org/presentationml/2006/main">
+  <p:cSld>
+    <p:spTree>
+      <p:nvGrpSpPr>
+        <p:cNvPr id="1" name=""/>
+        <p:cNvGrpSpPr/>
+        <p:nvPr/>
+      </p:nvGrpSpPr>
+      <p:grpSpPr>
+        <a:xfrm>
+          <a:off x="0" y="0"/>
+          <a:ext cx="0" cy="0"/>
+          <a:chOff x="0" y="0"/>
+          <a:chExt cx="0" cy="0"/>
+        </a:xfrm>
+      </p:grpSpPr>
+      <p:sp>
+        <p:nvSpPr>
+          <p:cNvPr id="2" name="Slide Image Placeholder 1"/>
+          <p:cNvSpPr>
+            <a:spLocks noGrp="1" noRot="1" noChangeAspect="1"/>
+          </p:cNvSpPr>
+          <p:nvPr>
+            <p:ph type="sldImg"/>
+          </p:nvPr>
+        </p:nvSpPr>
+        <p:spPr/>
+      </p:sp>
+      <p:sp>
+        <p:nvSpPr>
+          <p:cNvPr id="3" name="Notes Placeholder 2"/>
+          <p:cNvSpPr>
+            <a:spLocks noGrp="1"/>
+          </p:cNvSpPr>
+          <p:nvPr>
+            <p:ph type="body" idx="1"/>
+          </p:nvPr>
+        </p:nvSpPr>
+        <p:spPr/>
+        <p:txBody>
+          <a:bodyPr/>
+          <a:lstStyle/>
+          <a:p>
+            <a:endParaRPr lang="en-US" dirty="0"/>
+          </a:p>
+        </p:txBody>
+      </p:sp>
+      <p:sp>
+        <p:nvSpPr>
+          <p:cNvPr id="4" name="Slide Number Placeholder 3"/>
+          <p:cNvSpPr>
+            <a:spLocks noGrp="1"/>
+          </p:cNvSpPr>
+          <p:nvPr>
+            <p:ph type="sldNum" sz="quarter" idx="5"/>
+          </p:nvPr>
+        </p:nvSpPr>
+        <p:spPr/>
+        <p:txBody>
+          <a:bodyPr/>
+          <a:lstStyle/>
+          <a:p>
+            <a:fld id="{4AA9B88B-3CB7-4870-AE6B-435724C3E8E3}" type="slidenum">
+              <a:rPr lang="en-US" smtClean="0"/>
               <a:t>9</a:t>
             </a:fld>
             <a:endParaRPr lang="en-US"/>
@@ -11277,7 +11361,7 @@
 </p:notes>
 </file>
 
-<file path=ppt/notesSlides/notesSlide2.xml><?xml version="1.0" encoding="utf-8"?>
+<file path=ppt/notesSlides/notesSlide3.xml><?xml version="1.0" encoding="utf-8"?>
 <p:notes xmlns:a="http://schemas.openxmlformats.org/drawingml/2006/main" xmlns:r="http://schemas.openxmlformats.org/officeDocument/2006/relationships" xmlns:p="http://schemas.openxmlformats.org/presentationml/2006/main">
   <p:cSld>
     <p:spTree>
@@ -14993,6 +15077,14 @@
 <file path=ppt/slides/slide1.xml><?xml version="1.0" encoding="utf-8"?>
 <p:sld xmlns:a="http://schemas.openxmlformats.org/drawingml/2006/main" xmlns:r="http://schemas.openxmlformats.org/officeDocument/2006/relationships" xmlns:p="http://schemas.openxmlformats.org/presentationml/2006/main">
   <p:cSld>
+    <p:bg>
+      <p:bgPr>
+        <a:solidFill>
+          <a:schemeClr val="bg1"/>
+        </a:solidFill>
+        <a:effectLst/>
+      </p:bgPr>
+    </p:bg>
     <p:spTree>
       <p:nvGrpSpPr>
         <p:cNvPr id="1" name=""/>
@@ -15007,12 +15099,221 @@
           <a:chExt cx="0" cy="0"/>
         </a:xfrm>
       </p:grpSpPr>
+      <p:cxnSp>
+        <p:nvCxnSpPr>
+          <p:cNvPr id="11" name="Straight Connector 10">
+            <a:extLst>
+              <a:ext uri="{FF2B5EF4-FFF2-40B4-BE49-F238E27FC236}">
+                <a16:creationId xmlns:a16="http://schemas.microsoft.com/office/drawing/2014/main" id="{F64F9B95-9045-48D2-B9F3-2927E98F54AA}"/>
+              </a:ext>
+              <a:ext uri="{C183D7F6-B498-43B3-948B-1728B52AA6E4}">
+                <adec:decorative xmlns:adec="http://schemas.microsoft.com/office/drawing/2017/decorative" val="1"/>
+              </a:ext>
+            </a:extLst>
+          </p:cNvPr>
+          <p:cNvCxnSpPr>
+            <a:cxnSpLocks noGrp="1" noRot="1" noChangeAspect="1" noMove="1" noResize="1" noEditPoints="1" noAdjustHandles="1" noChangeArrowheads="1" noChangeShapeType="1"/>
+          </p:cNvCxnSpPr>
+          <p:nvPr>
+            <p:extLst>
+              <p:ext uri="{386F3935-93C4-4BCD-93E2-E3B085C9AB24}">
+                <p16:designElem xmlns:p16="http://schemas.microsoft.com/office/powerpoint/2015/main" val="1"/>
+              </p:ext>
+            </p:extLst>
+          </p:nvPr>
+        </p:nvCxnSpPr>
+        <p:spPr>
+          <a:xfrm>
+            <a:off x="800100" y="723900"/>
+            <a:ext cx="10591800" cy="0"/>
+          </a:xfrm>
+          <a:prstGeom prst="line">
+            <a:avLst/>
+          </a:prstGeom>
+          <a:ln w="44450">
+            <a:solidFill>
+              <a:schemeClr val="tx1"/>
+            </a:solidFill>
+          </a:ln>
+        </p:spPr>
+        <p:style>
+          <a:lnRef idx="1">
+            <a:schemeClr val="accent1"/>
+          </a:lnRef>
+          <a:fillRef idx="0">
+            <a:schemeClr val="accent1"/>
+          </a:fillRef>
+          <a:effectRef idx="0">
+            <a:schemeClr val="accent1"/>
+          </a:effectRef>
+          <a:fontRef idx="minor">
+            <a:schemeClr val="tx1"/>
+          </a:fontRef>
+        </p:style>
+      </p:cxnSp>
+      <p:cxnSp>
+        <p:nvCxnSpPr>
+          <p:cNvPr id="13" name="Straight Connector 12">
+            <a:extLst>
+              <a:ext uri="{FF2B5EF4-FFF2-40B4-BE49-F238E27FC236}">
+                <a16:creationId xmlns:a16="http://schemas.microsoft.com/office/drawing/2014/main" id="{085AA86F-6A4D-4BCB-A045-D992CDC2959B}"/>
+              </a:ext>
+              <a:ext uri="{C183D7F6-B498-43B3-948B-1728B52AA6E4}">
+                <adec:decorative xmlns:adec="http://schemas.microsoft.com/office/drawing/2017/decorative" val="1"/>
+              </a:ext>
+            </a:extLst>
+          </p:cNvPr>
+          <p:cNvCxnSpPr>
+            <a:cxnSpLocks noGrp="1" noRot="1" noChangeAspect="1" noMove="1" noResize="1" noEditPoints="1" noAdjustHandles="1" noChangeArrowheads="1" noChangeShapeType="1"/>
+          </p:cNvCxnSpPr>
+          <p:nvPr>
+            <p:extLst>
+              <p:ext uri="{386F3935-93C4-4BCD-93E2-E3B085C9AB24}">
+                <p16:designElem xmlns:p16="http://schemas.microsoft.com/office/powerpoint/2015/main" val="1"/>
+              </p:ext>
+            </p:extLst>
+          </p:nvPr>
+        </p:nvCxnSpPr>
+        <p:spPr>
+          <a:xfrm>
+            <a:off x="800100" y="6142781"/>
+            <a:ext cx="10591800" cy="0"/>
+          </a:xfrm>
+          <a:prstGeom prst="line">
+            <a:avLst/>
+          </a:prstGeom>
+          <a:ln w="12700">
+            <a:solidFill>
+              <a:schemeClr val="tx1"/>
+            </a:solidFill>
+          </a:ln>
+        </p:spPr>
+        <p:style>
+          <a:lnRef idx="1">
+            <a:schemeClr val="accent1"/>
+          </a:lnRef>
+          <a:fillRef idx="0">
+            <a:schemeClr val="accent1"/>
+          </a:fillRef>
+          <a:effectRef idx="0">
+            <a:schemeClr val="accent1"/>
+          </a:effectRef>
+          <a:fontRef idx="minor">
+            <a:schemeClr val="tx1"/>
+          </a:fontRef>
+        </p:style>
+      </p:cxnSp>
+      <p:sp useBgFill="1">
+        <p:nvSpPr>
+          <p:cNvPr id="15" name="Rectangle 14">
+            <a:extLst>
+              <a:ext uri="{FF2B5EF4-FFF2-40B4-BE49-F238E27FC236}">
+                <a16:creationId xmlns:a16="http://schemas.microsoft.com/office/drawing/2014/main" id="{33E93247-6229-44AB-A550-739E971E690B}"/>
+              </a:ext>
+              <a:ext uri="{C183D7F6-B498-43B3-948B-1728B52AA6E4}">
+                <adec:decorative xmlns:adec="http://schemas.microsoft.com/office/drawing/2017/decorative" val="1"/>
+              </a:ext>
+            </a:extLst>
+          </p:cNvPr>
+          <p:cNvSpPr>
+            <a:spLocks noGrp="1" noRot="1" noChangeAspect="1" noMove="1" noResize="1" noEditPoints="1" noAdjustHandles="1" noChangeArrowheads="1" noChangeShapeType="1" noTextEdit="1"/>
+          </p:cNvSpPr>
+          <p:nvPr>
+            <p:extLst>
+              <p:ext uri="{386F3935-93C4-4BCD-93E2-E3B085C9AB24}">
+                <p16:designElem xmlns:p16="http://schemas.microsoft.com/office/powerpoint/2015/main" val="1"/>
+              </p:ext>
+            </p:extLst>
+          </p:nvPr>
+        </p:nvSpPr>
+        <p:spPr>
+          <a:xfrm>
+            <a:off x="0" y="0"/>
+            <a:ext cx="12192000" cy="6858000"/>
+          </a:xfrm>
+          <a:prstGeom prst="rect">
+            <a:avLst/>
+          </a:prstGeom>
+          <a:ln w="12700" cap="flat" cmpd="sng" algn="ctr">
+            <a:noFill/>
+            <a:prstDash val="solid"/>
+            <a:miter lim="800000"/>
+          </a:ln>
+          <a:effectLst/>
+          <a:extLst>
+            <a:ext uri="{91240B29-F687-4F45-9708-019B960494DF}">
+              <a14:hiddenLine xmlns:a14="http://schemas.microsoft.com/office/drawing/2010/main" w="12700" cap="flat" cmpd="sng" algn="ctr">
+                <a:solidFill>
+                  <a:schemeClr val="accent1">
+                    <a:shade val="50000"/>
+                  </a:schemeClr>
+                </a:solidFill>
+                <a:prstDash val="solid"/>
+                <a:miter lim="800000"/>
+              </a14:hiddenLine>
+            </a:ext>
+          </a:extLst>
+        </p:spPr>
+        <p:style>
+          <a:lnRef idx="2">
+            <a:schemeClr val="accent1">
+              <a:shade val="50000"/>
+            </a:schemeClr>
+          </a:lnRef>
+          <a:fillRef idx="1">
+            <a:schemeClr val="accent1"/>
+          </a:fillRef>
+          <a:effectRef idx="0">
+            <a:schemeClr val="accent1"/>
+          </a:effectRef>
+          <a:fontRef idx="minor">
+            <a:schemeClr val="lt1"/>
+          </a:fontRef>
+        </p:style>
+        <p:txBody>
+          <a:bodyPr rtlCol="0" anchor="ctr"/>
+          <a:lstStyle/>
+          <a:p>
+            <a:pPr marL="0" marR="0" lvl="0" indent="0" algn="ctr" defTabSz="914400" rtl="0" eaLnBrk="1" fontAlgn="auto" latinLnBrk="0" hangingPunct="1">
+              <a:lnSpc>
+                <a:spcPct val="100000"/>
+              </a:lnSpc>
+              <a:spcBef>
+                <a:spcPts val="0"/>
+              </a:spcBef>
+              <a:spcAft>
+                <a:spcPts val="0"/>
+              </a:spcAft>
+              <a:buClrTx/>
+              <a:buSzTx/>
+              <a:buFontTx/>
+              <a:buNone/>
+              <a:tabLst/>
+              <a:defRPr/>
+            </a:pPr>
+            <a:endParaRPr kumimoji="0" lang="en-US" sz="1800" b="0" i="0" u="none" strike="noStrike" kern="1200" cap="none" spc="0" normalizeH="0" baseline="0" noProof="0">
+              <a:ln>
+                <a:noFill/>
+              </a:ln>
+              <a:solidFill>
+                <a:srgbClr val="FFFFFF"/>
+              </a:solidFill>
+              <a:effectLst/>
+              <a:uLnTx/>
+              <a:uFillTx/>
+              <a:latin typeface="Calisto MT"/>
+              <a:ea typeface="+mn-ea"/>
+              <a:cs typeface="+mn-cs"/>
+            </a:endParaRPr>
+          </a:p>
+        </p:txBody>
+      </p:sp>
       <p:pic>
         <p:nvPicPr>
-          <p:cNvPr id="4" name="Picture 3" descr="Mosquito on skin">
+          <p:cNvPr id="6" name="Picture 5" descr="A mosquito with a red body&#10;&#10;AI-generated content may be incorrect.">
             <a:extLst>
               <a:ext uri="{FF2B5EF4-FFF2-40B4-BE49-F238E27FC236}">
-                <a16:creationId xmlns:a16="http://schemas.microsoft.com/office/drawing/2014/main" id="{65D4F05B-C040-D079-2A17-9B8745F0FA51}"/>
+                <a16:creationId xmlns:a16="http://schemas.microsoft.com/office/drawing/2014/main" id="{15CB5264-4BF0-686B-AC87-2724ED61A734}"/>
               </a:ext>
             </a:extLst>
           </p:cNvPr>
@@ -15022,8 +15323,17 @@
           <p:nvPr/>
         </p:nvPicPr>
         <p:blipFill>
-          <a:blip r:embed="rId2"/>
-          <a:srcRect t="7861" b="4591"/>
+          <a:blip r:embed="rId2">
+            <a:extLst>
+              <a:ext uri="{28A0092B-C50C-407E-A947-70E740481C1C}">
+                <a14:useLocalDpi xmlns:a14="http://schemas.microsoft.com/office/drawing/2010/main" val="0"/>
+              </a:ext>
+              <a:ext uri="{837473B0-CC2E-450A-ABE3-18F120FF3D39}">
+                <a1611:picAttrSrcUrl xmlns:a1611="http://schemas.microsoft.com/office/drawing/2016/11/main" r:id="rId3"/>
+              </a:ext>
+            </a:extLst>
+          </a:blip>
+          <a:srcRect t="3266" r="9091" b="22623"/>
           <a:stretch>
             <a:fillRect/>
           </a:stretch>
@@ -15040,6 +15350,120 @@
       </p:pic>
       <p:sp>
         <p:nvSpPr>
+          <p:cNvPr id="17" name="Rectangle 16">
+            <a:extLst>
+              <a:ext uri="{FF2B5EF4-FFF2-40B4-BE49-F238E27FC236}">
+                <a16:creationId xmlns:a16="http://schemas.microsoft.com/office/drawing/2014/main" id="{D21F66AB-6D67-4C86-A415-0B6E4EEC5ABA}"/>
+              </a:ext>
+              <a:ext uri="{C183D7F6-B498-43B3-948B-1728B52AA6E4}">
+                <adec:decorative xmlns:adec="http://schemas.microsoft.com/office/drawing/2017/decorative" val="1"/>
+              </a:ext>
+            </a:extLst>
+          </p:cNvPr>
+          <p:cNvSpPr>
+            <a:spLocks noGrp="1" noRot="1" noChangeAspect="1" noMove="1" noResize="1" noEditPoints="1" noAdjustHandles="1" noChangeArrowheads="1" noChangeShapeType="1" noTextEdit="1"/>
+          </p:cNvSpPr>
+          <p:nvPr>
+            <p:extLst>
+              <p:ext uri="{386F3935-93C4-4BCD-93E2-E3B085C9AB24}">
+                <p16:designElem xmlns:p16="http://schemas.microsoft.com/office/powerpoint/2015/main" val="1"/>
+              </p:ext>
+            </p:extLst>
+          </p:nvPr>
+        </p:nvSpPr>
+        <p:spPr>
+          <a:xfrm rot="5400000">
+            <a:off x="-423811" y="423809"/>
+            <a:ext cx="6858002" cy="6010383"/>
+          </a:xfrm>
+          <a:prstGeom prst="rect">
+            <a:avLst/>
+          </a:prstGeom>
+          <a:gradFill>
+            <a:gsLst>
+              <a:gs pos="0">
+                <a:schemeClr val="bg1">
+                  <a:alpha val="0"/>
+                </a:schemeClr>
+              </a:gs>
+              <a:gs pos="46000">
+                <a:schemeClr val="bg1">
+                  <a:alpha val="31000"/>
+                </a:schemeClr>
+              </a:gs>
+              <a:gs pos="26000">
+                <a:schemeClr val="bg1">
+                  <a:alpha val="17000"/>
+                </a:schemeClr>
+              </a:gs>
+              <a:gs pos="100000">
+                <a:schemeClr val="bg1">
+                  <a:alpha val="45000"/>
+                </a:schemeClr>
+              </a:gs>
+            </a:gsLst>
+            <a:lin ang="5400000" scaled="1"/>
+          </a:gradFill>
+          <a:ln>
+            <a:noFill/>
+          </a:ln>
+        </p:spPr>
+        <p:style>
+          <a:lnRef idx="2">
+            <a:schemeClr val="accent1">
+              <a:shade val="50000"/>
+            </a:schemeClr>
+          </a:lnRef>
+          <a:fillRef idx="1">
+            <a:schemeClr val="accent1"/>
+          </a:fillRef>
+          <a:effectRef idx="0">
+            <a:schemeClr val="accent1"/>
+          </a:effectRef>
+          <a:fontRef idx="minor">
+            <a:schemeClr val="lt1"/>
+          </a:fontRef>
+        </p:style>
+        <p:txBody>
+          <a:bodyPr rtlCol="0" anchor="ctr"/>
+          <a:lstStyle/>
+          <a:p>
+            <a:pPr marL="0" marR="0" lvl="0" indent="0" algn="ctr" defTabSz="914400" rtl="0" eaLnBrk="1" fontAlgn="auto" latinLnBrk="0" hangingPunct="1">
+              <a:lnSpc>
+                <a:spcPct val="100000"/>
+              </a:lnSpc>
+              <a:spcBef>
+                <a:spcPts val="0"/>
+              </a:spcBef>
+              <a:spcAft>
+                <a:spcPts val="0"/>
+              </a:spcAft>
+              <a:buClrTx/>
+              <a:buSzTx/>
+              <a:buFontTx/>
+              <a:buNone/>
+              <a:tabLst/>
+              <a:defRPr/>
+            </a:pPr>
+            <a:endParaRPr kumimoji="0" lang="en-US" sz="1800" b="0" i="0" u="none" strike="noStrike" kern="1200" cap="none" spc="0" normalizeH="0" baseline="0" noProof="0">
+              <a:ln>
+                <a:noFill/>
+              </a:ln>
+              <a:solidFill>
+                <a:srgbClr val="FFFFFF"/>
+              </a:solidFill>
+              <a:effectLst/>
+              <a:uLnTx/>
+              <a:uFillTx/>
+              <a:latin typeface="Calisto MT"/>
+              <a:ea typeface="+mn-ea"/>
+              <a:cs typeface="+mn-cs"/>
+            </a:endParaRPr>
+          </a:p>
+        </p:txBody>
+      </p:sp>
+      <p:sp>
+        <p:nvSpPr>
           <p:cNvPr id="2" name="Title 1">
             <a:extLst>
               <a:ext uri="{FF2B5EF4-FFF2-40B4-BE49-F238E27FC236}">
@@ -15051,23 +15475,23 @@
             <a:spLocks noGrp="1"/>
           </p:cNvSpPr>
           <p:nvPr>
-            <p:ph type="ctrTitle"/>
+            <p:ph type="title"/>
           </p:nvPr>
         </p:nvSpPr>
         <p:spPr>
           <a:xfrm>
-            <a:off x="320039" y="175147"/>
-            <a:ext cx="7978385" cy="916234"/>
+            <a:off x="313786" y="908651"/>
+            <a:ext cx="5230366" cy="4005454"/>
           </a:xfrm>
         </p:spPr>
         <p:txBody>
-          <a:bodyPr anchor="ctr">
+          <a:bodyPr vert="horz" lIns="91440" tIns="45720" rIns="91440" bIns="45720" rtlCol="0" anchor="t">
             <a:normAutofit/>
           </a:bodyPr>
           <a:lstStyle/>
           <a:p>
             <a:r>
-              <a:rPr lang="en-US" sz="3600" dirty="0"/>
+              <a:rPr lang="en-US" sz="6800"/>
               <a:t>Malaria Predictive model</a:t>
             </a:r>
           </a:p>
@@ -15086,29 +15510,83 @@
             <a:spLocks noGrp="1"/>
           </p:cNvSpPr>
           <p:nvPr>
-            <p:ph type="subTitle" idx="1"/>
+            <p:ph idx="1"/>
           </p:nvPr>
         </p:nvSpPr>
         <p:spPr>
           <a:xfrm>
-            <a:off x="8298426" y="196597"/>
-            <a:ext cx="3634494" cy="868139"/>
+            <a:off x="313787" y="5050632"/>
+            <a:ext cx="3793200" cy="1129888"/>
           </a:xfrm>
         </p:spPr>
         <p:txBody>
-          <a:bodyPr anchor="ctr">
+          <a:bodyPr vert="horz" lIns="91440" tIns="45720" rIns="91440" bIns="45720" rtlCol="0" anchor="b">
             <a:normAutofit/>
           </a:bodyPr>
           <a:lstStyle/>
           <a:p>
-            <a:pPr algn="r"/>
-            <a:r>
-              <a:rPr lang="en-US" sz="1800" dirty="0"/>
+            <a:pPr marL="0" indent="0">
+              <a:buNone/>
+            </a:pPr>
+            <a:r>
+              <a:rPr lang="en-US" sz="2200"/>
               <a:t>Group 2</a:t>
             </a:r>
           </a:p>
         </p:txBody>
       </p:sp>
+      <p:cxnSp>
+        <p:nvCxnSpPr>
+          <p:cNvPr id="19" name="Straight Connector 18">
+            <a:extLst>
+              <a:ext uri="{FF2B5EF4-FFF2-40B4-BE49-F238E27FC236}">
+                <a16:creationId xmlns:a16="http://schemas.microsoft.com/office/drawing/2014/main" id="{0B66F5E1-B07D-4718-F4B4-5FCE4B7E8F44}"/>
+              </a:ext>
+              <a:ext uri="{C183D7F6-B498-43B3-948B-1728B52AA6E4}">
+                <adec:decorative xmlns:adec="http://schemas.microsoft.com/office/drawing/2017/decorative" val="1"/>
+              </a:ext>
+            </a:extLst>
+          </p:cNvPr>
+          <p:cNvCxnSpPr>
+            <a:cxnSpLocks noGrp="1" noRot="1" noChangeAspect="1" noMove="1" noResize="1" noEditPoints="1" noAdjustHandles="1" noChangeArrowheads="1" noChangeShapeType="1"/>
+          </p:cNvCxnSpPr>
+          <p:nvPr>
+            <p:extLst>
+              <p:ext uri="{386F3935-93C4-4BCD-93E2-E3B085C9AB24}">
+                <p16:designElem xmlns:p16="http://schemas.microsoft.com/office/powerpoint/2015/main" val="1"/>
+              </p:ext>
+            </p:extLst>
+          </p:nvPr>
+        </p:nvCxnSpPr>
+        <p:spPr>
+          <a:xfrm>
+            <a:off x="439006" y="727509"/>
+            <a:ext cx="1638300" cy="0"/>
+          </a:xfrm>
+          <a:prstGeom prst="line">
+            <a:avLst/>
+          </a:prstGeom>
+          <a:ln w="44450">
+            <a:solidFill>
+              <a:schemeClr val="tx1"/>
+            </a:solidFill>
+          </a:ln>
+        </p:spPr>
+        <p:style>
+          <a:lnRef idx="1">
+            <a:schemeClr val="accent1"/>
+          </a:lnRef>
+          <a:fillRef idx="0">
+            <a:schemeClr val="accent1"/>
+          </a:fillRef>
+          <a:effectRef idx="0">
+            <a:schemeClr val="accent1"/>
+          </a:effectRef>
+          <a:fontRef idx="minor">
+            <a:schemeClr val="tx1"/>
+          </a:fontRef>
+        </p:style>
+      </p:cxnSp>
     </p:spTree>
     <p:extLst>
       <p:ext uri="{BB962C8B-B14F-4D97-AF65-F5344CB8AC3E}">
@@ -16326,6 +16804,14 @@
 <file path=ppt/slides/slide11.xml><?xml version="1.0" encoding="utf-8"?>
 <p:sld xmlns:a="http://schemas.openxmlformats.org/drawingml/2006/main" xmlns:r="http://schemas.openxmlformats.org/officeDocument/2006/relationships" xmlns:p="http://schemas.openxmlformats.org/presentationml/2006/main">
   <p:cSld>
+    <p:bg>
+      <p:bgPr>
+        <a:solidFill>
+          <a:schemeClr val="bg1"/>
+        </a:solidFill>
+        <a:effectLst/>
+      </p:bgPr>
+    </p:bg>
     <p:spTree>
       <p:nvGrpSpPr>
         <p:cNvPr id="1" name=""/>
@@ -16340,6 +16826,186 @@
           <a:chExt cx="0" cy="0"/>
         </a:xfrm>
       </p:grpSpPr>
+      <p:cxnSp>
+        <p:nvCxnSpPr>
+          <p:cNvPr id="17" name="Straight Connector 16">
+            <a:extLst>
+              <a:ext uri="{FF2B5EF4-FFF2-40B4-BE49-F238E27FC236}">
+                <a16:creationId xmlns:a16="http://schemas.microsoft.com/office/drawing/2014/main" id="{F64F9B95-9045-48D2-B9F3-2927E98F54AA}"/>
+              </a:ext>
+              <a:ext uri="{C183D7F6-B498-43B3-948B-1728B52AA6E4}">
+                <adec:decorative xmlns:adec="http://schemas.microsoft.com/office/drawing/2017/decorative" val="1"/>
+              </a:ext>
+            </a:extLst>
+          </p:cNvPr>
+          <p:cNvCxnSpPr>
+            <a:cxnSpLocks noGrp="1" noRot="1" noChangeAspect="1" noMove="1" noResize="1" noEditPoints="1" noAdjustHandles="1" noChangeArrowheads="1" noChangeShapeType="1"/>
+          </p:cNvCxnSpPr>
+          <p:nvPr>
+            <p:extLst>
+              <p:ext uri="{386F3935-93C4-4BCD-93E2-E3B085C9AB24}">
+                <p16:designElem xmlns:p16="http://schemas.microsoft.com/office/powerpoint/2015/main" val="1"/>
+              </p:ext>
+            </p:extLst>
+          </p:nvPr>
+        </p:nvCxnSpPr>
+        <p:spPr>
+          <a:xfrm>
+            <a:off x="800100" y="723900"/>
+            <a:ext cx="10591800" cy="0"/>
+          </a:xfrm>
+          <a:prstGeom prst="line">
+            <a:avLst/>
+          </a:prstGeom>
+          <a:ln w="44450">
+            <a:solidFill>
+              <a:schemeClr val="tx1"/>
+            </a:solidFill>
+          </a:ln>
+        </p:spPr>
+        <p:style>
+          <a:lnRef idx="1">
+            <a:schemeClr val="accent1"/>
+          </a:lnRef>
+          <a:fillRef idx="0">
+            <a:schemeClr val="accent1"/>
+          </a:fillRef>
+          <a:effectRef idx="0">
+            <a:schemeClr val="accent1"/>
+          </a:effectRef>
+          <a:fontRef idx="minor">
+            <a:schemeClr val="tx1"/>
+          </a:fontRef>
+        </p:style>
+      </p:cxnSp>
+      <p:cxnSp>
+        <p:nvCxnSpPr>
+          <p:cNvPr id="18" name="Straight Connector 17">
+            <a:extLst>
+              <a:ext uri="{FF2B5EF4-FFF2-40B4-BE49-F238E27FC236}">
+                <a16:creationId xmlns:a16="http://schemas.microsoft.com/office/drawing/2014/main" id="{085AA86F-6A4D-4BCB-A045-D992CDC2959B}"/>
+              </a:ext>
+              <a:ext uri="{C183D7F6-B498-43B3-948B-1728B52AA6E4}">
+                <adec:decorative xmlns:adec="http://schemas.microsoft.com/office/drawing/2017/decorative" val="1"/>
+              </a:ext>
+            </a:extLst>
+          </p:cNvPr>
+          <p:cNvCxnSpPr>
+            <a:cxnSpLocks noGrp="1" noRot="1" noChangeAspect="1" noMove="1" noResize="1" noEditPoints="1" noAdjustHandles="1" noChangeArrowheads="1" noChangeShapeType="1"/>
+          </p:cNvCxnSpPr>
+          <p:nvPr>
+            <p:extLst>
+              <p:ext uri="{386F3935-93C4-4BCD-93E2-E3B085C9AB24}">
+                <p16:designElem xmlns:p16="http://schemas.microsoft.com/office/powerpoint/2015/main" val="1"/>
+              </p:ext>
+            </p:extLst>
+          </p:nvPr>
+        </p:nvCxnSpPr>
+        <p:spPr>
+          <a:xfrm>
+            <a:off x="800100" y="6142781"/>
+            <a:ext cx="10591800" cy="0"/>
+          </a:xfrm>
+          <a:prstGeom prst="line">
+            <a:avLst/>
+          </a:prstGeom>
+          <a:ln w="12700">
+            <a:solidFill>
+              <a:schemeClr val="tx1"/>
+            </a:solidFill>
+          </a:ln>
+        </p:spPr>
+        <p:style>
+          <a:lnRef idx="1">
+            <a:schemeClr val="accent1"/>
+          </a:lnRef>
+          <a:fillRef idx="0">
+            <a:schemeClr val="accent1"/>
+          </a:fillRef>
+          <a:effectRef idx="0">
+            <a:schemeClr val="accent1"/>
+          </a:effectRef>
+          <a:fontRef idx="minor">
+            <a:schemeClr val="tx1"/>
+          </a:fontRef>
+        </p:style>
+      </p:cxnSp>
+      <p:sp useBgFill="1">
+        <p:nvSpPr>
+          <p:cNvPr id="19" name="Rectangle 18">
+            <a:extLst>
+              <a:ext uri="{FF2B5EF4-FFF2-40B4-BE49-F238E27FC236}">
+                <a16:creationId xmlns:a16="http://schemas.microsoft.com/office/drawing/2014/main" id="{DEF92653-5D6D-47E6-8744-0DAF76E049C4}"/>
+              </a:ext>
+              <a:ext uri="{C183D7F6-B498-43B3-948B-1728B52AA6E4}">
+                <adec:decorative xmlns:adec="http://schemas.microsoft.com/office/drawing/2017/decorative" val="1"/>
+              </a:ext>
+            </a:extLst>
+          </p:cNvPr>
+          <p:cNvSpPr>
+            <a:spLocks noGrp="1" noRot="1" noChangeAspect="1" noMove="1" noResize="1" noEditPoints="1" noAdjustHandles="1" noChangeArrowheads="1" noChangeShapeType="1" noTextEdit="1"/>
+          </p:cNvSpPr>
+          <p:nvPr>
+            <p:extLst>
+              <p:ext uri="{386F3935-93C4-4BCD-93E2-E3B085C9AB24}">
+                <p16:designElem xmlns:p16="http://schemas.microsoft.com/office/powerpoint/2015/main" val="1"/>
+              </p:ext>
+            </p:extLst>
+          </p:nvPr>
+        </p:nvSpPr>
+        <p:spPr>
+          <a:xfrm>
+            <a:off x="0" y="0"/>
+            <a:ext cx="12192000" cy="6858000"/>
+          </a:xfrm>
+          <a:prstGeom prst="rect">
+            <a:avLst/>
+          </a:prstGeom>
+          <a:ln w="12700" cap="flat" cmpd="sng" algn="ctr">
+            <a:noFill/>
+            <a:prstDash val="solid"/>
+            <a:miter lim="800000"/>
+          </a:ln>
+          <a:effectLst/>
+          <a:extLst>
+            <a:ext uri="{91240B29-F687-4F45-9708-019B960494DF}">
+              <a14:hiddenLine xmlns:a14="http://schemas.microsoft.com/office/drawing/2010/main" w="12700" cap="flat" cmpd="sng" algn="ctr">
+                <a:solidFill>
+                  <a:schemeClr val="accent1">
+                    <a:shade val="50000"/>
+                  </a:schemeClr>
+                </a:solidFill>
+                <a:prstDash val="solid"/>
+                <a:miter lim="800000"/>
+              </a14:hiddenLine>
+            </a:ext>
+          </a:extLst>
+        </p:spPr>
+        <p:style>
+          <a:lnRef idx="2">
+            <a:schemeClr val="accent1">
+              <a:shade val="50000"/>
+            </a:schemeClr>
+          </a:lnRef>
+          <a:fillRef idx="1">
+            <a:schemeClr val="accent1"/>
+          </a:fillRef>
+          <a:effectRef idx="0">
+            <a:schemeClr val="accent1"/>
+          </a:effectRef>
+          <a:fontRef idx="minor">
+            <a:schemeClr val="lt1"/>
+          </a:fontRef>
+        </p:style>
+        <p:txBody>
+          <a:bodyPr rtlCol="0" anchor="ctr"/>
+          <a:lstStyle/>
+          <a:p>
+            <a:pPr algn="ctr"/>
+            <a:endParaRPr lang="en-US"/>
+          </a:p>
+        </p:txBody>
+      </p:sp>
       <p:sp>
         <p:nvSpPr>
           <p:cNvPr id="2" name="Title 1">
@@ -16356,18 +17022,78 @@
             <p:ph type="title"/>
           </p:nvPr>
         </p:nvSpPr>
-        <p:spPr/>
+        <p:spPr>
+          <a:xfrm>
+            <a:off x="800102" y="960594"/>
+            <a:ext cx="5828114" cy="4936812"/>
+          </a:xfrm>
+        </p:spPr>
         <p:txBody>
-          <a:bodyPr/>
+          <a:bodyPr vert="horz" lIns="91440" tIns="45720" rIns="91440" bIns="45720" rtlCol="0" anchor="ctr">
+            <a:normAutofit/>
+          </a:bodyPr>
           <a:lstStyle/>
           <a:p>
-            <a:r>
-              <a:rPr lang="en-US" dirty="0"/>
+            <a:pPr algn="r"/>
+            <a:r>
+              <a:rPr lang="en-US" sz="6000"/>
               <a:t>Feature engineering and tuning</a:t>
             </a:r>
           </a:p>
         </p:txBody>
       </p:sp>
+      <p:cxnSp>
+        <p:nvCxnSpPr>
+          <p:cNvPr id="20" name="Straight Connector 19">
+            <a:extLst>
+              <a:ext uri="{FF2B5EF4-FFF2-40B4-BE49-F238E27FC236}">
+                <a16:creationId xmlns:a16="http://schemas.microsoft.com/office/drawing/2014/main" id="{9CA98CE3-81A7-4FFE-A047-9AA65998D877}"/>
+              </a:ext>
+              <a:ext uri="{C183D7F6-B498-43B3-948B-1728B52AA6E4}">
+                <adec:decorative xmlns:adec="http://schemas.microsoft.com/office/drawing/2017/decorative" val="1"/>
+              </a:ext>
+            </a:extLst>
+          </p:cNvPr>
+          <p:cNvCxnSpPr>
+            <a:cxnSpLocks noGrp="1" noRot="1" noChangeAspect="1" noMove="1" noResize="1" noEditPoints="1" noAdjustHandles="1" noChangeArrowheads="1" noChangeShapeType="1"/>
+          </p:cNvCxnSpPr>
+          <p:nvPr>
+            <p:extLst>
+              <p:ext uri="{386F3935-93C4-4BCD-93E2-E3B085C9AB24}">
+                <p16:designElem xmlns:p16="http://schemas.microsoft.com/office/powerpoint/2015/main" val="1"/>
+              </p:ext>
+            </p:extLst>
+          </p:nvPr>
+        </p:nvCxnSpPr>
+        <p:spPr>
+          <a:xfrm flipV="1">
+            <a:off x="7315200" y="1733549"/>
+            <a:ext cx="0" cy="3390901"/>
+          </a:xfrm>
+          <a:prstGeom prst="line">
+            <a:avLst/>
+          </a:prstGeom>
+          <a:ln w="44450">
+            <a:solidFill>
+              <a:schemeClr val="tx1"/>
+            </a:solidFill>
+          </a:ln>
+        </p:spPr>
+        <p:style>
+          <a:lnRef idx="1">
+            <a:schemeClr val="accent1"/>
+          </a:lnRef>
+          <a:fillRef idx="0">
+            <a:schemeClr val="accent1"/>
+          </a:fillRef>
+          <a:effectRef idx="0">
+            <a:schemeClr val="accent1"/>
+          </a:effectRef>
+          <a:fontRef idx="minor">
+            <a:schemeClr val="tx1"/>
+          </a:fontRef>
+        </p:style>
+      </p:cxnSp>
     </p:spTree>
     <p:extLst>
       <p:ext uri="{BB962C8B-B14F-4D97-AF65-F5344CB8AC3E}">
@@ -16439,7 +17165,7 @@
             <p:ph idx="1"/>
             <p:extLst>
               <p:ext uri="{D42A27DB-BD31-4B8C-83A1-F6EECF244321}">
-                <p14:modId xmlns:p14="http://schemas.microsoft.com/office/powerpoint/2010/main" val="1707782729"/>
+                <p14:modId xmlns:p14="http://schemas.microsoft.com/office/powerpoint/2010/main" val="3312885657"/>
               </p:ext>
             </p:extLst>
           </p:nvPr>
@@ -18558,7 +19284,7 @@
             <p:ph idx="1"/>
             <p:extLst>
               <p:ext uri="{D42A27DB-BD31-4B8C-83A1-F6EECF244321}">
-                <p14:modId xmlns:p14="http://schemas.microsoft.com/office/powerpoint/2010/main" val="578376561"/>
+                <p14:modId xmlns:p14="http://schemas.microsoft.com/office/powerpoint/2010/main" val="180110871"/>
               </p:ext>
             </p:extLst>
           </p:nvPr>
@@ -18777,7 +19503,10 @@
                     <a:bodyPr/>
                     <a:lstStyle/>
                     <a:p>
-                      <a:endParaRPr lang="en-US" dirty="0"/>
+                      <a:r>
+                        <a:rPr lang="en-US" dirty="0"/>
+                        <a:t>193</a:t>
+                      </a:r>
                     </a:p>
                   </a:txBody>
                   <a:tcPr/>
@@ -18813,7 +19542,7 @@
                     <a:p>
                       <a:r>
                         <a:rPr lang="en-US" dirty="0"/>
-                        <a:t>0.57</a:t>
+                        <a:t>0.61</a:t>
                       </a:r>
                     </a:p>
                   </a:txBody>
@@ -18825,10 +19554,9 @@
                     <a:lstStyle/>
                     <a:p>
                       <a:r>
-                        <a:rPr lang="en-US"/>
-                        <a:t>0.92</a:t>
+                        <a:rPr lang="en-US" dirty="0"/>
+                        <a:t>0.85</a:t>
                       </a:r>
-                      <a:endParaRPr lang="en-US" dirty="0"/>
                     </a:p>
                   </a:txBody>
                   <a:tcPr/>
@@ -18840,7 +19568,7 @@
                     <a:p>
                       <a:r>
                         <a:rPr lang="en-US" dirty="0"/>
-                        <a:t>0.86</a:t>
+                        <a:t>0.87</a:t>
                       </a:r>
                     </a:p>
                   </a:txBody>
@@ -20185,7 +20913,7 @@
             <p:ph idx="1"/>
             <p:extLst>
               <p:ext uri="{D42A27DB-BD31-4B8C-83A1-F6EECF244321}">
-                <p14:modId xmlns:p14="http://schemas.microsoft.com/office/powerpoint/2010/main" val="471876025"/>
+                <p14:modId xmlns:p14="http://schemas.microsoft.com/office/powerpoint/2010/main" val="1507965718"/>
               </p:ext>
             </p:extLst>
           </p:nvPr>
@@ -20196,7 +20924,7 @@
         </p:xfrm>
         <a:graphic>
           <a:graphicData uri="http://schemas.openxmlformats.org/drawingml/2006/diagram">
-            <dgm:relIds xmlns:dgm="http://schemas.openxmlformats.org/drawingml/2006/diagram" xmlns:r="http://schemas.openxmlformats.org/officeDocument/2006/relationships" r:dm="rId2" r:lo="rId3" r:qs="rId4" r:cs="rId5"/>
+            <dgm:relIds xmlns:dgm="http://schemas.openxmlformats.org/drawingml/2006/diagram" xmlns:r="http://schemas.openxmlformats.org/officeDocument/2006/relationships" r:dm="rId3" r:lo="rId4" r:qs="rId5" r:cs="rId6"/>
           </a:graphicData>
         </a:graphic>
       </p:graphicFrame>
